--- a/classes/parte-2-deep-learning/172-entrenamiento-multi-dispositivo-tf-distribute/clase-172-entrenamiento-multi-dispositivo-tf-distribute-presentacion.pptx
+++ b/classes/parte-2-deep-learning/172-entrenamiento-multi-dispositivo-tf-distribute/clase-172-entrenamiento-multi-dispositivo-tf-distribute-presentacion.pptx
@@ -4823,7 +4823,7 @@
                 </a:solidFill>
                 <a:latin typeface="Segoe UI"/>
               </a:rPr>
-              <a:t>Primer bloque ejecutable del notebook.</a:t>
+              <a:t>Cada GPU tiene una réplica del modelo, procesa un mini-batch distinto, y los gradientes se promedian con all-reduce. Todo se construye dentro de strategy.scope().</a:t>
             </a:r>
           </a:p>
         </p:txBody>
@@ -4910,7 +4910,387 @@
                 </a:solidFill>
                 <a:latin typeface="Courier New"/>
               </a:rPr>
-              <a:t># Imports y configuración inicial</a:t>
+              <a:t>try:</a:t>
+            </a:r>
+          </a:p>
+          <a:p>
+            <a:pPr>
+              <a:defRPr sz="1200" b="0">
+                <a:solidFill>
+                  <a:srgbClr val="F8FAFC"/>
+                </a:solidFill>
+                <a:latin typeface="Courier New"/>
+              </a:defRPr>
+            </a:pPr>
+            <a:r>
+              <a:rPr sz="1200" b="0">
+                <a:solidFill>
+                  <a:srgbClr val="F8FAFC"/>
+                </a:solidFill>
+                <a:latin typeface="Courier New"/>
+              </a:rPr>
+              <a:t>    import tensorflow as tf</a:t>
+            </a:r>
+          </a:p>
+          <a:p>
+            <a:pPr>
+              <a:defRPr sz="1200" b="0">
+                <a:solidFill>
+                  <a:srgbClr val="F8FAFC"/>
+                </a:solidFill>
+                <a:latin typeface="Courier New"/>
+              </a:defRPr>
+            </a:pPr>
+            <a:r>
+              <a:rPr sz="1200" b="0">
+                <a:solidFill>
+                  <a:srgbClr val="F8FAFC"/>
+                </a:solidFill>
+                <a:latin typeface="Courier New"/>
+              </a:rPr>
+              <a:t>    from tensorflow import keras</a:t>
+            </a:r>
+          </a:p>
+          <a:p>
+            <a:pPr>
+              <a:defRPr sz="1200" b="0">
+                <a:solidFill>
+                  <a:srgbClr val="F8FAFC"/>
+                </a:solidFill>
+                <a:latin typeface="Courier New"/>
+              </a:defRPr>
+            </a:pPr>
+            <a:r>
+              <a:rPr sz="1200" b="0">
+                <a:solidFill>
+                  <a:srgbClr val="F8FAFC"/>
+                </a:solidFill>
+                <a:latin typeface="Courier New"/>
+              </a:rPr>
+              <a:t>    TF_OK = True</a:t>
+            </a:r>
+          </a:p>
+          <a:p>
+            <a:pPr>
+              <a:defRPr sz="1200" b="0">
+                <a:solidFill>
+                  <a:srgbClr val="F8FAFC"/>
+                </a:solidFill>
+                <a:latin typeface="Courier New"/>
+              </a:defRPr>
+            </a:pPr>
+            <a:r>
+              <a:rPr sz="1200" b="0">
+                <a:solidFill>
+                  <a:srgbClr val="F8FAFC"/>
+                </a:solidFill>
+                <a:latin typeface="Courier New"/>
+              </a:rPr>
+              <a:t>except Exception:</a:t>
+            </a:r>
+          </a:p>
+          <a:p>
+            <a:pPr>
+              <a:defRPr sz="1200" b="0">
+                <a:solidFill>
+                  <a:srgbClr val="F8FAFC"/>
+                </a:solidFill>
+                <a:latin typeface="Courier New"/>
+              </a:defRPr>
+            </a:pPr>
+            <a:r>
+              <a:rPr sz="1200" b="0">
+                <a:solidFill>
+                  <a:srgbClr val="F8FAFC"/>
+                </a:solidFill>
+                <a:latin typeface="Courier New"/>
+              </a:rPr>
+              <a:t>    TF_OK = False</a:t>
+            </a:r>
+          </a:p>
+          <a:p>
+            <a:pPr>
+              <a:defRPr sz="1200" b="0">
+                <a:solidFill>
+                  <a:srgbClr val="F8FAFC"/>
+                </a:solidFill>
+                <a:latin typeface="Courier New"/>
+              </a:defRPr>
+            </a:pPr>
+            <a:r>
+              <a:rPr sz="1200" b="0">
+                <a:solidFill>
+                  <a:srgbClr val="F8FAFC"/>
+                </a:solidFill>
+                <a:latin typeface="Courier New"/>
+              </a:rPr>
+              <a:t>    print("tensorflow no instalado -&gt; se muestra la API (no se ejecuta)")</a:t>
+            </a:r>
+          </a:p>
+          <a:p>
+            <a:pPr>
+              <a:defRPr sz="1200" b="0">
+                <a:solidFill>
+                  <a:srgbClr val="F8FAFC"/>
+                </a:solidFill>
+                <a:latin typeface="Courier New"/>
+              </a:defRPr>
+            </a:pPr>
+            <a:r>
+              <a:rPr sz="1200" b="0">
+                <a:solidFill>
+                  <a:srgbClr val="F8FAFC"/>
+                </a:solidFill>
+                <a:latin typeface="Courier New"/>
+              </a:rPr>
+              <a:t> </a:t>
+            </a:r>
+          </a:p>
+          <a:p>
+            <a:pPr>
+              <a:defRPr sz="1200" b="0">
+                <a:solidFill>
+                  <a:srgbClr val="F8FAFC"/>
+                </a:solidFill>
+                <a:latin typeface="Courier New"/>
+              </a:defRPr>
+            </a:pPr>
+            <a:r>
+              <a:rPr sz="1200" b="0">
+                <a:solidFill>
+                  <a:srgbClr val="F8FAFC"/>
+                </a:solidFill>
+                <a:latin typeface="Courier New"/>
+              </a:rPr>
+              <a:t>if TF_OK:</a:t>
+            </a:r>
+          </a:p>
+          <a:p>
+            <a:pPr>
+              <a:defRPr sz="1200" b="0">
+                <a:solidFill>
+                  <a:srgbClr val="F8FAFC"/>
+                </a:solidFill>
+                <a:latin typeface="Courier New"/>
+              </a:defRPr>
+            </a:pPr>
+            <a:r>
+              <a:rPr sz="1200" b="0">
+                <a:solidFill>
+                  <a:srgbClr val="F8FAFC"/>
+                </a:solidFill>
+                <a:latin typeface="Courier New"/>
+              </a:rPr>
+              <a:t>    strategy = tf.distribute.MirroredStrategy()</a:t>
+            </a:r>
+          </a:p>
+          <a:p>
+            <a:pPr>
+              <a:defRPr sz="1200" b="0">
+                <a:solidFill>
+                  <a:srgbClr val="F8FAFC"/>
+                </a:solidFill>
+                <a:latin typeface="Courier New"/>
+              </a:defRPr>
+            </a:pPr>
+            <a:r>
+              <a:rPr sz="1200" b="0">
+                <a:solidFill>
+                  <a:srgbClr val="F8FAFC"/>
+                </a:solidFill>
+                <a:latin typeface="Courier New"/>
+              </a:rPr>
+              <a:t>    print("replicas en sync:", strategy.num_replicas_in_sync)</a:t>
+            </a:r>
+          </a:p>
+          <a:p>
+            <a:pPr>
+              <a:defRPr sz="1200" b="0">
+                <a:solidFill>
+                  <a:srgbClr val="F8FAFC"/>
+                </a:solidFill>
+                <a:latin typeface="Courier New"/>
+              </a:defRPr>
+            </a:pPr>
+            <a:r>
+              <a:rPr sz="1200" b="0">
+                <a:solidFill>
+                  <a:srgbClr val="F8FAFC"/>
+                </a:solidFill>
+                <a:latin typeface="Courier New"/>
+              </a:rPr>
+              <a:t>    with strategy.scope():</a:t>
+            </a:r>
+          </a:p>
+          <a:p>
+            <a:pPr>
+              <a:defRPr sz="1200" b="0">
+                <a:solidFill>
+                  <a:srgbClr val="F8FAFC"/>
+                </a:solidFill>
+                <a:latin typeface="Courier New"/>
+              </a:defRPr>
+            </a:pPr>
+            <a:r>
+              <a:rPr sz="1200" b="0">
+                <a:solidFill>
+                  <a:srgbClr val="F8FAFC"/>
+                </a:solidFill>
+                <a:latin typeface="Courier New"/>
+              </a:rPr>
+              <a:t>        model = keras.Sequential([</a:t>
+            </a:r>
+          </a:p>
+          <a:p>
+            <a:pPr>
+              <a:defRPr sz="1200" b="0">
+                <a:solidFill>
+                  <a:srgbClr val="F8FAFC"/>
+                </a:solidFill>
+                <a:latin typeface="Courier New"/>
+              </a:defRPr>
+            </a:pPr>
+            <a:r>
+              <a:rPr sz="1200" b="0">
+                <a:solidFill>
+                  <a:srgbClr val="F8FAFC"/>
+                </a:solidFill>
+                <a:latin typeface="Courier New"/>
+              </a:rPr>
+              <a:t>            keras.Input(shape=(784,)),</a:t>
+            </a:r>
+          </a:p>
+          <a:p>
+            <a:pPr>
+              <a:defRPr sz="1200" b="0">
+                <a:solidFill>
+                  <a:srgbClr val="F8FAFC"/>
+                </a:solidFill>
+                <a:latin typeface="Courier New"/>
+              </a:defRPr>
+            </a:pPr>
+            <a:r>
+              <a:rPr sz="1200" b="0">
+                <a:solidFill>
+                  <a:srgbClr val="F8FAFC"/>
+                </a:solidFill>
+                <a:latin typeface="Courier New"/>
+              </a:rPr>
+              <a:t>            keras.layers.Dense(256, activation="relu"),</a:t>
+            </a:r>
+          </a:p>
+          <a:p>
+            <a:pPr>
+              <a:defRPr sz="1200" b="0">
+                <a:solidFill>
+                  <a:srgbClr val="F8FAFC"/>
+                </a:solidFill>
+                <a:latin typeface="Courier New"/>
+              </a:defRPr>
+            </a:pPr>
+            <a:r>
+              <a:rPr sz="1200" b="0">
+                <a:solidFill>
+                  <a:srgbClr val="F8FAFC"/>
+                </a:solidFill>
+                <a:latin typeface="Courier New"/>
+              </a:rPr>
+              <a:t>            keras.layers.Dense(10, activation="softmax"),</a:t>
+            </a:r>
+          </a:p>
+          <a:p>
+            <a:pPr>
+              <a:defRPr sz="1200" b="0">
+                <a:solidFill>
+                  <a:srgbClr val="F8FAFC"/>
+                </a:solidFill>
+                <a:latin typeface="Courier New"/>
+              </a:defRPr>
+            </a:pPr>
+            <a:r>
+              <a:rPr sz="1200" b="0">
+                <a:solidFill>
+                  <a:srgbClr val="F8FAFC"/>
+                </a:solidFill>
+                <a:latin typeface="Courier New"/>
+              </a:rPr>
+              <a:t>        ])</a:t>
+            </a:r>
+          </a:p>
+          <a:p>
+            <a:pPr>
+              <a:defRPr sz="1200" b="0">
+                <a:solidFill>
+                  <a:srgbClr val="F8FAFC"/>
+                </a:solidFill>
+                <a:latin typeface="Courier New"/>
+              </a:defRPr>
+            </a:pPr>
+            <a:r>
+              <a:rPr sz="1200" b="0">
+                <a:solidFill>
+                  <a:srgbClr val="F8FAFC"/>
+                </a:solidFill>
+                <a:latin typeface="Courier New"/>
+              </a:rPr>
+              <a:t>        model.compile(optimizer="adam", loss="sparse_categorical_crossentropy",</a:t>
+            </a:r>
+          </a:p>
+          <a:p>
+            <a:pPr>
+              <a:defRPr sz="1200" b="0">
+                <a:solidFill>
+                  <a:srgbClr val="F8FAFC"/>
+                </a:solidFill>
+                <a:latin typeface="Courier New"/>
+              </a:defRPr>
+            </a:pPr>
+            <a:r>
+              <a:rPr sz="1200" b="0">
+                <a:solidFill>
+                  <a:srgbClr val="F8FAFC"/>
+                </a:solidFill>
+                <a:latin typeface="Courier New"/>
+              </a:rPr>
+              <a:t>                      metrics=["accuracy"])</a:t>
+            </a:r>
+          </a:p>
+          <a:p>
+            <a:pPr>
+              <a:defRPr sz="1200" b="0">
+                <a:solidFill>
+                  <a:srgbClr val="F8FAFC"/>
+                </a:solidFill>
+                <a:latin typeface="Courier New"/>
+              </a:defRPr>
+            </a:pPr>
+            <a:r>
+              <a:rPr sz="1200" b="0">
+                <a:solidFill>
+                  <a:srgbClr val="F8FAFC"/>
+                </a:solidFill>
+                <a:latin typeface="Courier New"/>
+              </a:rPr>
+              <a:t>    print("modelo replicado en todas las GPUs del nodo")</a:t>
+            </a:r>
+          </a:p>
+          <a:p>
+            <a:pPr>
+              <a:defRPr sz="1200" b="0">
+                <a:solidFill>
+                  <a:srgbClr val="F8FAFC"/>
+                </a:solidFill>
+                <a:latin typeface="Courier New"/>
+              </a:defRPr>
+            </a:pPr>
+            <a:r>
+              <a:rPr sz="1200" b="0">
+                <a:solidFill>
+                  <a:srgbClr val="F8FAFC"/>
+                </a:solidFill>
+                <a:latin typeface="Courier New"/>
+              </a:rPr>
+              <a:t># ... (truncado)</a:t>
             </a:r>
           </a:p>
         </p:txBody>

--- a/classes/parte-2-deep-learning/172-entrenamiento-multi-dispositivo-tf-distribute/clase-172-entrenamiento-multi-dispositivo-tf-distribute-presentacion.pptx
+++ b/classes/parte-2-deep-learning/172-entrenamiento-multi-dispositivo-tf-distribute/clase-172-entrenamiento-multi-dispositivo-tf-distribute-presentacion.pptx
@@ -3272,7 +3272,7 @@
                 </a:solidFill>
                 <a:latin typeface="Segoe UI"/>
               </a:rPr>
-              <a:t>Parte: 2 — Deep Learning · Fuente: Géron, cap. 19 § Training Models Across Multiple Devices.  Duración estimada: 75 min.</a:t>
+              <a:t>Parte: 2 — Deep Learning · Fuente: Géron, cap. 19 § Training Models Across Multiple Devices.  Duración estimada: 75 min. · Nivel: Avanzado</a:t>
             </a:r>
           </a:p>
         </p:txBody>
@@ -3581,7 +3581,7 @@
                 </a:solidFill>
                 <a:latin typeface="Segoe UI"/>
               </a:rPr>
-              <a:t>Parte: 2 — Deep Learning · Fuente: Géron, cap. 19 § Training Models Across Multiple Devices.  Duración estimada: 75 min.</a:t>
+              <a:t>Parte: 2 — Deep Learning · Fuente: Géron, cap. 19 § Training Models Across Multiple Devices.  Duración estimada: 75 min. · Nivel: Avanzado</a:t>
             </a:r>
           </a:p>
         </p:txBody>
